--- a/CalendarioAgo2026/presentaciones/3_Componentes.pptx
+++ b/CalendarioAgo2026/presentaciones/3_Componentes.pptx
@@ -150,6 +150,35 @@
 </p:presentation>
 </file>
 
+<file path=ppt/changesInfos/changesInfo1.xml><?xml version="1.0" encoding="utf-8"?>
+<pc:chgInfo xmlns:a="http://schemas.openxmlformats.org/drawingml/2006/main" xmlns:r="http://schemas.openxmlformats.org/officeDocument/2006/relationships" xmlns:ac="http://schemas.microsoft.com/office/drawing/2013/main/command" xmlns:pc="http://schemas.microsoft.com/office/powerpoint/2013/main/command">
+  <pc:docChgLst>
+    <pc:chgData name="Lizethe Pérez Fuertes" userId="4ae9ef87-2a7d-42f8-8dfa-0a501a9e2ff4" providerId="ADAL" clId="{FDDD45CB-1330-4033-A842-3D2746AFF7C7}"/>
+    <pc:docChg chg="custSel modSld">
+      <pc:chgData name="Lizethe Pérez Fuertes" userId="4ae9ef87-2a7d-42f8-8dfa-0a501a9e2ff4" providerId="ADAL" clId="{FDDD45CB-1330-4033-A842-3D2746AFF7C7}" dt="2026-08-07T00:44:12.948" v="17" actId="27636"/>
+      <pc:docMkLst>
+        <pc:docMk/>
+      </pc:docMkLst>
+      <pc:sldChg chg="modSp mod">
+        <pc:chgData name="Lizethe Pérez Fuertes" userId="4ae9ef87-2a7d-42f8-8dfa-0a501a9e2ff4" providerId="ADAL" clId="{FDDD45CB-1330-4033-A842-3D2746AFF7C7}" dt="2026-08-07T00:44:12.948" v="17" actId="27636"/>
+        <pc:sldMkLst>
+          <pc:docMk/>
+          <pc:sldMk cId="2553855534" sldId="257"/>
+        </pc:sldMkLst>
+        <pc:spChg chg="mod">
+          <ac:chgData name="Lizethe Pérez Fuertes" userId="4ae9ef87-2a7d-42f8-8dfa-0a501a9e2ff4" providerId="ADAL" clId="{FDDD45CB-1330-4033-A842-3D2746AFF7C7}" dt="2026-08-07T00:44:12.948" v="17" actId="27636"/>
+          <ac:spMkLst>
+            <pc:docMk/>
+            <pc:sldMk cId="2553855534" sldId="257"/>
+            <ac:spMk id="2" creationId="{00000000-0000-0000-0000-000000000000}"/>
+          </ac:spMkLst>
+        </pc:spChg>
+      </pc:sldChg>
+    </pc:docChg>
+  </pc:docChgLst>
+</pc:chgInfo>
+</file>
+
 <file path=ppt/notesMasters/notesMaster1.xml><?xml version="1.0" encoding="utf-8"?>
 <p:notesMaster xmlns:a="http://schemas.openxmlformats.org/drawingml/2006/main" xmlns:r="http://schemas.openxmlformats.org/officeDocument/2006/relationships" xmlns:p="http://schemas.openxmlformats.org/presentationml/2006/main">
   <p:cSld>
@@ -232,7 +261,7 @@
           <a:p>
             <a:fld id="{2D445F07-8756-451B-A938-0248325FC7BB}" type="datetimeFigureOut">
               <a:rPr lang="es-MX" smtClean="0"/>
-              <a:t>12/08/2022</a:t>
+              <a:t>06/08/2026</a:t>
             </a:fld>
             <a:endParaRPr lang="es-MX" dirty="0"/>
           </a:p>
@@ -2025,7 +2054,7 @@
           <a:p>
             <a:fld id="{5E75A0DC-66C6-4CEC-A5EB-F8C97CEC3796}" type="datetimeFigureOut">
               <a:rPr lang="es-MX" smtClean="0"/>
-              <a:t>12/08/2022</a:t>
+              <a:t>06/08/2026</a:t>
             </a:fld>
             <a:endParaRPr lang="es-MX" dirty="0"/>
           </a:p>
@@ -2195,7 +2224,7 @@
           <a:p>
             <a:fld id="{5E75A0DC-66C6-4CEC-A5EB-F8C97CEC3796}" type="datetimeFigureOut">
               <a:rPr lang="es-MX" smtClean="0"/>
-              <a:t>12/08/2022</a:t>
+              <a:t>06/08/2026</a:t>
             </a:fld>
             <a:endParaRPr lang="es-MX" dirty="0"/>
           </a:p>
@@ -2375,7 +2404,7 @@
           <a:p>
             <a:fld id="{5E75A0DC-66C6-4CEC-A5EB-F8C97CEC3796}" type="datetimeFigureOut">
               <a:rPr lang="es-MX" smtClean="0"/>
-              <a:t>12/08/2022</a:t>
+              <a:t>06/08/2026</a:t>
             </a:fld>
             <a:endParaRPr lang="es-MX" dirty="0"/>
           </a:p>
@@ -2528,7 +2557,7 @@
           <a:p>
             <a:fld id="{1D8BD707-D9CF-40AE-B4C6-C98DA3205C09}" type="datetimeFigureOut">
               <a:rPr lang="en-US" smtClean="0"/>
-              <a:t>8/12/2022</a:t>
+              <a:t>8/6/2026</a:t>
             </a:fld>
             <a:endParaRPr lang="en-US"/>
           </a:p>
@@ -2688,7 +2717,7 @@
           <a:p>
             <a:fld id="{5E75A0DC-66C6-4CEC-A5EB-F8C97CEC3796}" type="datetimeFigureOut">
               <a:rPr lang="es-MX" smtClean="0"/>
-              <a:t>12/08/2022</a:t>
+              <a:t>06/08/2026</a:t>
             </a:fld>
             <a:endParaRPr lang="es-MX" dirty="0"/>
           </a:p>
@@ -2934,7 +2963,7 @@
           <a:p>
             <a:fld id="{5E75A0DC-66C6-4CEC-A5EB-F8C97CEC3796}" type="datetimeFigureOut">
               <a:rPr lang="es-MX" smtClean="0"/>
-              <a:t>12/08/2022</a:t>
+              <a:t>06/08/2026</a:t>
             </a:fld>
             <a:endParaRPr lang="es-MX" dirty="0"/>
           </a:p>
@@ -3222,7 +3251,7 @@
           <a:p>
             <a:fld id="{5E75A0DC-66C6-4CEC-A5EB-F8C97CEC3796}" type="datetimeFigureOut">
               <a:rPr lang="es-MX" smtClean="0"/>
-              <a:t>12/08/2022</a:t>
+              <a:t>06/08/2026</a:t>
             </a:fld>
             <a:endParaRPr lang="es-MX" dirty="0"/>
           </a:p>
@@ -3644,7 +3673,7 @@
           <a:p>
             <a:fld id="{5E75A0DC-66C6-4CEC-A5EB-F8C97CEC3796}" type="datetimeFigureOut">
               <a:rPr lang="es-MX" smtClean="0"/>
-              <a:t>12/08/2022</a:t>
+              <a:t>06/08/2026</a:t>
             </a:fld>
             <a:endParaRPr lang="es-MX" dirty="0"/>
           </a:p>
@@ -3762,7 +3791,7 @@
           <a:p>
             <a:fld id="{5E75A0DC-66C6-4CEC-A5EB-F8C97CEC3796}" type="datetimeFigureOut">
               <a:rPr lang="es-MX" smtClean="0"/>
-              <a:t>12/08/2022</a:t>
+              <a:t>06/08/2026</a:t>
             </a:fld>
             <a:endParaRPr lang="es-MX" dirty="0"/>
           </a:p>
@@ -3857,7 +3886,7 @@
           <a:p>
             <a:fld id="{5E75A0DC-66C6-4CEC-A5EB-F8C97CEC3796}" type="datetimeFigureOut">
               <a:rPr lang="es-MX" smtClean="0"/>
-              <a:t>12/08/2022</a:t>
+              <a:t>06/08/2026</a:t>
             </a:fld>
             <a:endParaRPr lang="es-MX" dirty="0"/>
           </a:p>
@@ -4134,7 +4163,7 @@
           <a:p>
             <a:fld id="{5E75A0DC-66C6-4CEC-A5EB-F8C97CEC3796}" type="datetimeFigureOut">
               <a:rPr lang="es-MX" smtClean="0"/>
-              <a:t>12/08/2022</a:t>
+              <a:t>06/08/2026</a:t>
             </a:fld>
             <a:endParaRPr lang="es-MX" dirty="0"/>
           </a:p>
@@ -4387,7 +4416,7 @@
           <a:p>
             <a:fld id="{5E75A0DC-66C6-4CEC-A5EB-F8C97CEC3796}" type="datetimeFigureOut">
               <a:rPr lang="es-MX" smtClean="0"/>
-              <a:t>12/08/2022</a:t>
+              <a:t>06/08/2026</a:t>
             </a:fld>
             <a:endParaRPr lang="es-MX" dirty="0"/>
           </a:p>
@@ -4600,7 +4629,7 @@
           <a:p>
             <a:fld id="{5E75A0DC-66C6-4CEC-A5EB-F8C97CEC3796}" type="datetimeFigureOut">
               <a:rPr lang="es-MX" smtClean="0"/>
-              <a:t>12/08/2022</a:t>
+              <a:t>06/08/2026</a:t>
             </a:fld>
             <a:endParaRPr lang="es-MX" dirty="0"/>
           </a:p>
@@ -4994,7 +5023,7 @@
         </p:spPr>
         <p:txBody>
           <a:bodyPr rtlCol="0">
-            <a:normAutofit fontScale="90000"/>
+            <a:normAutofit/>
           </a:bodyPr>
           <a:lstStyle/>
           <a:p>
@@ -5012,7 +5041,7 @@
                   </a:schemeClr>
                 </a:solidFill>
               </a:rPr>
-              <a:t>TC1028 </a:t>
+              <a:t>TC 1037 </a:t>
             </a:r>
             <a:br>
               <a:rPr lang="es-MX" sz="3200" dirty="0">
@@ -5031,7 +5060,7 @@
                   </a:schemeClr>
                 </a:solidFill>
               </a:rPr>
-              <a:t>Pensamiento Computacional para Ingeniería</a:t>
+              <a:t>Pensamiento algorítmico</a:t>
             </a:r>
           </a:p>
         </p:txBody>
